--- a/dist/초2/진로·직업/강점발견/초2_진로·직업_강점발견_01_잘하는일찾기_학생용.pptx
+++ b/dist/초2/진로·직업/강점발견/초2_진로·직업_강점발견_01_잘하는일찾기_학생용.pptx
@@ -114,34 +114,34 @@
   <p:extLst>
     <p:ext uri="{521415D9-36F7-43E2-AB2F-B90AF26B5E84}">
       <p14:sectionLst xmlns:p14="http://schemas.microsoft.com/office/powerpoint/2010/main">
-        <p14:section name="도입" id="{29910481-71c1-db26-dc53-7ca04f83c741}">
+        <p14:section name="도입" id="{db1995b2-2126-6965-5227-0fa2a2daaeba}">
           <p14:sldIdLst>
             <p14:sldId id="256"/>
             <p14:sldId id="257"/>
           </p14:sldIdLst>
         </p14:section>
-        <p14:section name="개념" id="{4f395b37-2dc1-038e-917b-a2291f3077cc}">
+        <p14:section name="개념" id="{d0e3df71-9952-949a-9fd7-91b645d54b4d}">
           <p14:sldIdLst>
             <p14:sldId id="258"/>
           </p14:sldIdLst>
         </p14:section>
-        <p14:section name="연습" id="{b452ebe6-9885-ccf4-681c-b91211e89923}">
+        <p14:section name="연습" id="{9014596b-f3c7-e4a2-03ea-70542a8f9d4c}">
           <p14:sldIdLst>
             <p14:sldId id="259"/>
             <p14:sldId id="260"/>
           </p14:sldIdLst>
         </p14:section>
-        <p14:section name="확인" id="{d2240d48-3e9d-e7d0-10fa-cda8210ffca9}">
+        <p14:section name="확인" id="{900b2dae-1f8a-6593-545f-9d0d0bf4aa46}">
           <p14:sldIdLst>
             <p14:sldId id="261"/>
           </p14:sldIdLst>
         </p14:section>
-        <p14:section name="정리" id="{a24e35f5-8ff1-910f-8274-41ed413f93cd}">
+        <p14:section name="정리" id="{f3dc26af-d706-ef89-1ec3-1304bb110ae6}">
           <p14:sldIdLst>
             <p14:sldId id="262"/>
           </p14:sldIdLst>
         </p14:section>
-        <p14:section name="보충" id="{4a727399-14ea-c42d-caee-84d5f3fa8894}">
+        <p14:section name="보충" id="{537e70ae-8e53-0f63-7fba-c3d3d63fb145}">
           <p14:sldIdLst>
             <p14:sldId id="263"/>
           </p14:sldIdLst>
